--- a/AI Bank - Fifa Mundial (1).pptx
+++ b/AI Bank - Fifa Mundial (1).pptx
@@ -7845,7 +7845,7 @@
         </p:nvSpPr>
         <p:spPr>
           <a:xfrm>
-            <a:off x="245872" y="3254248"/>
+            <a:off x="215392" y="3254248"/>
             <a:ext cx="928587" cy="983751"/>
           </a:xfrm>
           <a:prstGeom prst="rect">
@@ -7969,7 +7969,7 @@
         </p:nvSpPr>
         <p:spPr>
           <a:xfrm>
-            <a:off x="245872" y="5430520"/>
+            <a:off x="223012" y="5430520"/>
             <a:ext cx="928587" cy="983751"/>
           </a:xfrm>
           <a:prstGeom prst="rect">
@@ -8847,7 +8847,7 @@
         </p:nvSpPr>
         <p:spPr>
           <a:xfrm>
-            <a:off x="3121152" y="3254248"/>
+            <a:off x="3098292" y="3261868"/>
             <a:ext cx="1124768" cy="1520752"/>
           </a:xfrm>
           <a:prstGeom prst="rect">
@@ -8961,7 +8961,7 @@
         </p:nvSpPr>
         <p:spPr>
           <a:xfrm>
-            <a:off x="3121152" y="4886452"/>
+            <a:off x="3098292" y="4886452"/>
             <a:ext cx="1124768" cy="1520752"/>
           </a:xfrm>
           <a:prstGeom prst="rect">
@@ -14333,14 +14333,6 @@
               </a:rPr>
               <a:t>• Segmentación</a:t>
             </a:r>
-            <a:endParaRPr lang="es-EC" sz="900" noProof="0" dirty="0">
-              <a:solidFill>
-                <a:schemeClr val="tx2">
-                  <a:lumMod val="90000"/>
-                  <a:lumOff val="10000"/>
-                </a:schemeClr>
-              </a:solidFill>
-            </a:endParaRPr>
           </a:p>
         </p:txBody>
       </p:sp>
@@ -14997,6 +14989,75 @@
           </a:fontRef>
         </p:style>
       </p:cxnSp>
+      <p:sp>
+        <p:nvSpPr>
+          <p:cNvPr id="4" name="Text 21">
+            <a:extLst>
+              <a:ext uri="{FF2B5EF4-FFF2-40B4-BE49-F238E27FC236}">
+                <a16:creationId xmlns:a16="http://schemas.microsoft.com/office/drawing/2014/main" id="{1606FFFF-0025-AFD4-2799-649A7F2E88D1}"/>
+              </a:ext>
+            </a:extLst>
+          </p:cNvPr>
+          <p:cNvSpPr/>
+          <p:nvPr/>
+        </p:nvSpPr>
+        <p:spPr>
+          <a:xfrm>
+            <a:off x="4984060" y="5121449"/>
+            <a:ext cx="1682496" cy="450809"/>
+          </a:xfrm>
+          <a:prstGeom prst="rect">
+            <a:avLst/>
+          </a:prstGeom>
+          <a:noFill/>
+          <a:ln/>
+        </p:spPr>
+        <p:txBody>
+          <a:bodyPr wrap="square" lIns="0" tIns="0" rIns="0" bIns="0" rtlCol="0" anchor="ctr"/>
+          <a:lstStyle/>
+          <a:p>
+            <a:pPr marL="0" indent="0" algn="l">
+              <a:buNone/>
+            </a:pPr>
+            <a:r>
+              <a:rPr lang="es-EC" sz="900" b="1" noProof="0" dirty="0">
+                <a:solidFill>
+                  <a:schemeClr val="tx2">
+                    <a:lumMod val="90000"/>
+                    <a:lumOff val="10000"/>
+                  </a:schemeClr>
+                </a:solidFill>
+                <a:ea typeface="Calibri" pitchFamily="34" charset="-122"/>
+                <a:cs typeface="Calibri" pitchFamily="34" charset="-120"/>
+              </a:rPr>
+              <a:t>• </a:t>
+            </a:r>
+            <a:r>
+              <a:rPr lang="es-EC" sz="900" b="1" noProof="0" dirty="0" err="1">
+                <a:solidFill>
+                  <a:schemeClr val="tx2">
+                    <a:lumMod val="90000"/>
+                    <a:lumOff val="10000"/>
+                  </a:schemeClr>
+                </a:solidFill>
+                <a:ea typeface="Calibri" pitchFamily="34" charset="-122"/>
+                <a:cs typeface="Calibri" pitchFamily="34" charset="-120"/>
+              </a:rPr>
+              <a:t>Matchmaking</a:t>
+            </a:r>
+            <a:endParaRPr lang="es-EC" sz="900" b="1" noProof="0" dirty="0">
+              <a:solidFill>
+                <a:schemeClr val="tx2">
+                  <a:lumMod val="90000"/>
+                  <a:lumOff val="10000"/>
+                </a:schemeClr>
+              </a:solidFill>
+              <a:ea typeface="Calibri" pitchFamily="34" charset="-122"/>
+              <a:cs typeface="Calibri" pitchFamily="34" charset="-120"/>
+            </a:endParaRPr>
+          </a:p>
+        </p:txBody>
+      </p:sp>
     </p:spTree>
     <p:extLst>
       <p:ext uri="{BB962C8B-B14F-4D97-AF65-F5344CB8AC3E}">
@@ -15107,6 +15168,36 @@
           </a:p>
         </p:txBody>
       </p:sp>
+      <p:pic>
+        <p:nvPicPr>
+          <p:cNvPr id="4" name="Imagen 3">
+            <a:extLst>
+              <a:ext uri="{FF2B5EF4-FFF2-40B4-BE49-F238E27FC236}">
+                <a16:creationId xmlns:a16="http://schemas.microsoft.com/office/drawing/2014/main" id="{914DEA2C-57AE-DDA2-69B6-B572CA3AFDB4}"/>
+              </a:ext>
+            </a:extLst>
+          </p:cNvPr>
+          <p:cNvPicPr>
+            <a:picLocks noChangeAspect="1"/>
+          </p:cNvPicPr>
+          <p:nvPr/>
+        </p:nvPicPr>
+        <p:blipFill>
+          <a:blip r:embed="rId2"/>
+          <a:stretch>
+            <a:fillRect/>
+          </a:stretch>
+        </p:blipFill>
+        <p:spPr>
+          <a:xfrm>
+            <a:off x="0" y="3090594"/>
+            <a:ext cx="6858000" cy="3724812"/>
+          </a:xfrm>
+          <a:prstGeom prst="rect">
+            <a:avLst/>
+          </a:prstGeom>
+        </p:spPr>
+      </p:pic>
     </p:spTree>
     <p:extLst>
       <p:ext uri="{BB962C8B-B14F-4D97-AF65-F5344CB8AC3E}">
